--- a/docs/Презентация_7_минут.pptx
+++ b/docs/Презентация_7_минут.pptx
@@ -6507,7 +6507,7 @@
                 </a:solidFill>
                 <a:latin typeface="Segoe UI"/>
               </a:rPr>
-              <a:t>Стек: Python 3.11+, FastAPI, SQLite, 62 автотеста</a:t>
+              <a:t>Стек: Python 3.11+, FastAPI, SQLite, 65 автотестов</a:t>
             </a:r>
           </a:p>
         </p:txBody>
@@ -9471,7 +9471,7 @@
                 </a:solidFill>
                 <a:latin typeface="Segoe UI"/>
               </a:rPr>
-              <a:t>62 автотеста</a:t>
+              <a:t>65 автотестов</a:t>
             </a:r>
           </a:p>
         </p:txBody>
@@ -11170,7 +11170,7 @@
                 </a:solidFill>
                 <a:latin typeface="Segoe UI"/>
               </a:rPr>
-              <a:t>62</a:t>
+              <a:t>65</a:t>
             </a:r>
           </a:p>
         </p:txBody>
@@ -11212,7 +11212,7 @@
                 </a:solidFill>
                 <a:latin typeface="Segoe UI"/>
               </a:rPr>
-              <a:t>автотеста</a:t>
+              <a:t>автотестов</a:t>
             </a:r>
           </a:p>
         </p:txBody>

--- a/docs/Презентация_7_минут.pptx
+++ b/docs/Презентация_7_минут.pptx
@@ -1000,7 +1000,7 @@
           <a:lstStyle/>
           <a:p>
             <a:r>
-              <a:t>40 секунд. Честно про ограничения: проверку исполнения не делали — кейс разрешает; поиск на правилах, а не на модели; SQLite. Следующий шаг — связать задачу со следующими звонками клиента по номеру.</a:t>
+              <a:t>40 секунд. Честно про ограничения: проверку исполнения не делали — кейс разрешает; поиск на правилах, а не на модели; SQLite. Следующий шаг — пилот на реальной нагрузке и замер точности проверки.</a:t>
             </a:r>
           </a:p>
         </p:txBody>
@@ -1070,7 +1070,7 @@
           <a:lstStyle/>
           <a:p>
             <a:r>
-              <a:t>25 секунд. Итог: 52 звонка, 189 задач, 3,6 обещания на звонок, 62 теста. Следующий шаг — проверка исполнения по последующим звонкам. Ссылка на репозиторий на слайде. Спасибо, готовы к вопросам.</a:t>
+              <a:t>25 секунд. Итог: 52 звонка, 189 задач, 3,6 обещания на звонок, 78 тестов. Проверка исполнения по следующим звонкам уже работает. Дальше — пилот и точность. Спасибо, готовы к вопросам.</a:t>
             </a:r>
           </a:p>
         </p:txBody>
@@ -5568,7 +5568,7 @@
         <p:spPr>
           <a:xfrm>
             <a:off x="896112" y="3383280"/>
-            <a:ext cx="1938528" cy="1280160"/>
+            <a:ext cx="1938528" cy="1417320"/>
           </a:xfrm>
           <a:prstGeom prst="rect">
             <a:avLst/>
@@ -5831,7 +5831,7 @@
         <p:spPr>
           <a:xfrm>
             <a:off x="3675888" y="3383280"/>
-            <a:ext cx="1938528" cy="1280160"/>
+            <a:ext cx="1938528" cy="1417320"/>
           </a:xfrm>
           <a:prstGeom prst="rect">
             <a:avLst/>
@@ -6094,7 +6094,7 @@
         <p:spPr>
           <a:xfrm>
             <a:off x="6455664" y="3383280"/>
-            <a:ext cx="1938528" cy="1280160"/>
+            <a:ext cx="1938528" cy="1417320"/>
           </a:xfrm>
           <a:prstGeom prst="rect">
             <a:avLst/>
@@ -6357,7 +6357,7 @@
         <p:spPr>
           <a:xfrm>
             <a:off x="9235440" y="3383280"/>
-            <a:ext cx="1938528" cy="1280160"/>
+            <a:ext cx="1938528" cy="1417320"/>
           </a:xfrm>
           <a:prstGeom prst="rect">
             <a:avLst/>
@@ -6385,7 +6385,7 @@
                 </a:solidFill>
                 <a:latin typeface="Segoe UI"/>
               </a:rPr>
-              <a:t>создана → в работе → выполнена</a:t>
+              <a:t>создана → в работе →</a:t>
             </a:r>
           </a:p>
           <a:p>
@@ -6404,7 +6404,7 @@
                 </a:solidFill>
                 <a:latin typeface="Segoe UI"/>
               </a:rPr>
-              <a:t>просрочка ставится сама</a:t>
+              <a:t>выполнена</a:t>
             </a:r>
           </a:p>
           <a:p>
@@ -6423,7 +6423,7 @@
                 </a:solidFill>
                 <a:latin typeface="Segoe UI"/>
               </a:rPr>
-              <a:t>история изменений</a:t>
+              <a:t>просрочка и проверка</a:t>
             </a:r>
           </a:p>
         </p:txBody>
@@ -6507,7 +6507,7 @@
                 </a:solidFill>
                 <a:latin typeface="Segoe UI"/>
               </a:rPr>
-              <a:t>Стек: Python 3.11+, FastAPI, SQLite, 65 автотестов</a:t>
+              <a:t>Стек: Python 3.11+, FastAPI, SQLite, 78 тестов</a:t>
             </a:r>
           </a:p>
         </p:txBody>
@@ -9471,7 +9471,7 @@
                 </a:solidFill>
                 <a:latin typeface="Segoe UI"/>
               </a:rPr>
-              <a:t>65 автотестов</a:t>
+              <a:t>78 тестов</a:t>
             </a:r>
           </a:p>
         </p:txBody>
@@ -9513,7 +9513,7 @@
                 </a:solidFill>
                 <a:latin typeface="Segoe UI"/>
               </a:rPr>
-              <a:t>сроки, детектор, API, идемпотентность, прогон всех 52 расшифровок</a:t>
+              <a:t>сроки, детектор, API, идемпотентность, проверка исполнения</a:t>
             </a:r>
           </a:p>
         </p:txBody>
@@ -10117,7 +10117,7 @@
                 </a:solidFill>
                 <a:latin typeface="Segoe UI"/>
               </a:rPr>
-              <a:t>Проверка исполнения по следующим звонкам</a:t>
+              <a:t>Проверка исполнения — по правилам</a:t>
             </a:r>
           </a:p>
         </p:txBody>
@@ -10159,7 +10159,7 @@
                 </a:solidFill>
                 <a:latin typeface="Segoe UI"/>
               </a:rPr>
-              <a:t>разрешено не делать на минимальном уровне; точка расширения заложена</a:t>
+              <a:t>клиент должен явно сказать «перезвонили» или «не пришёл»</a:t>
             </a:r>
           </a:p>
         </p:txBody>
@@ -10747,7 +10747,7 @@
                 </a:solidFill>
                 <a:latin typeface="Segoe UI"/>
               </a:rPr>
-              <a:t>Дальше: связать задачу со следующими звонками клиента и закрывать её автоматически</a:t>
+              <a:t>Дальше: пилот на реальной нагрузке, точность проверки и PostgreSQL</a:t>
             </a:r>
           </a:p>
         </p:txBody>
@@ -11170,7 +11170,7 @@
                 </a:solidFill>
                 <a:latin typeface="Segoe UI"/>
               </a:rPr>
-              <a:t>65</a:t>
+              <a:t>78</a:t>
             </a:r>
           </a:p>
         </p:txBody>
@@ -11212,7 +11212,7 @@
                 </a:solidFill>
                 <a:latin typeface="Segoe UI"/>
               </a:rPr>
-              <a:t>автотестов</a:t>
+              <a:t>тестов</a:t>
             </a:r>
           </a:p>
         </p:txBody>
@@ -11296,7 +11296,7 @@
                 </a:solidFill>
                 <a:latin typeface="Segoe UI"/>
               </a:rPr>
-              <a:t>Следующий шаг</a:t>
+              <a:t>Дальше</a:t>
             </a:r>
           </a:p>
         </p:txBody>
@@ -11338,7 +11338,7 @@
                 </a:solidFill>
                 <a:latin typeface="Segoe UI"/>
               </a:rPr>
-              <a:t>Связать задачу со следующими звонками клиента</a:t>
+              <a:t>Пилот на реальной нагрузке:</a:t>
             </a:r>
           </a:p>
           <a:p>
@@ -11357,7 +11357,7 @@
                 </a:solidFill>
                 <a:latin typeface="Segoe UI"/>
               </a:rPr>
-              <a:t>и закрывать её автоматически</a:t>
+              <a:t>точность проверки и PostgreSQL</a:t>
             </a:r>
           </a:p>
         </p:txBody>

--- a/docs/Презентация_7_минут.pptx
+++ b/docs/Презентация_7_минут.pptx
@@ -6507,7 +6507,7 @@
                 </a:solidFill>
                 <a:latin typeface="Segoe UI"/>
               </a:rPr>
-              <a:t>Стек: Python 3.11+, FastAPI, SQLite, 78 тестов</a:t>
+              <a:t>Стек: Python 3.11+, FastAPI, SQLite, 119 тестов</a:t>
             </a:r>
           </a:p>
         </p:txBody>
@@ -9471,7 +9471,7 @@
                 </a:solidFill>
                 <a:latin typeface="Segoe UI"/>
               </a:rPr>
-              <a:t>78 тестов</a:t>
+              <a:t>119 тестов</a:t>
             </a:r>
           </a:p>
         </p:txBody>
@@ -11170,7 +11170,7 @@
                 </a:solidFill>
                 <a:latin typeface="Segoe UI"/>
               </a:rPr>
-              <a:t>78</a:t>
+              <a:t>119</a:t>
             </a:r>
           </a:p>
         </p:txBody>
